--- a/Topic_D/Exam_Practice/TD-L05_Writing_Workshop_Training_Qualifications_and_Skills.pptx
+++ b/Topic_D/Exam_Practice/TD-L05_Writing_Workshop_Training_Qualifications_and_Skills.pptx
@@ -784,7 +784,11 @@
           <a:lstStyle/>
           <a:p>
             <a:r>
-              <a:rPr lang="en-US" dirty="0"/>
+              <a:rPr lang="ar-SA" dirty="0">
+                <a:latin typeface="Amiri" pitchFamily="2" charset="-78"/>
+                <a:ea typeface="Amiri" pitchFamily="2" charset="-78"/>
+                <a:cs typeface="Amiri" pitchFamily="2" charset="-78"/>
+              </a:rPr>
               <a:t>Q3 (3 min to choose and read). Title (أ) suits Core and Develop; title (ب) suits Stretch.</a:t>
             </a:r>
             <a:endParaRPr lang="en-US" dirty="0"/>
@@ -1403,7 +1407,11 @@
           <a:lstStyle/>
           <a:p>
             <a:r>
-              <a:rPr lang="en-US" dirty="0"/>
+              <a:rPr lang="ar-SA" dirty="0">
+                <a:latin typeface="Amiri" pitchFamily="2" charset="-78"/>
+                <a:ea typeface="Amiri" pitchFamily="2" charset="-78"/>
+                <a:cs typeface="Amiri" pitchFamily="2" charset="-78"/>
+              </a:rPr>
               <a:t>WELCOME (1 min) — while students join.
 • Greet each student by name as they arrive: السَّلَامُ عَلَيْكُمْ. Take the register (Pastoral Tracker: attendance 0/1).
 • 2-MINUTE CHECK-IN (SEND training): a private chat to any student who seemed unsettled last lesson — “Are you okay today? 👍 / 👎”.
@@ -1936,7 +1944,11 @@
           <a:lstStyle/>
           <a:p>
             <a:r>
-              <a:rPr lang="en-US" dirty="0"/>
+              <a:rPr lang="ar-SA" dirty="0">
+                <a:latin typeface="Amiri" pitchFamily="2" charset="-78"/>
+                <a:ea typeface="Amiri" pitchFamily="2" charset="-78"/>
+                <a:cs typeface="Amiri" pitchFamily="2" charset="-78"/>
+              </a:rPr>
               <a:t>Question words: أَيُّ (which) · مَنْ (who) · الَّتِي لَدَيْكَ (that you have) · سَابِقَةٌ (previous — PAST) · سَتَفْعَلُ (will do — FUTURE).</a:t>
             </a:r>
             <a:endParaRPr lang="en-US" dirty="0"/>
@@ -2508,6 +2520,7 @@
                   <a:srgbClr val="D4AF37"/>
                 </a:solidFill>
                 <a:latin typeface="Amiri" pitchFamily="2" charset="-78"/>
+                <a:ea typeface="Amiri" pitchFamily="2" charset="-78"/>
                 <a:cs typeface="Amiri" pitchFamily="2" charset="-78"/>
               </a:rPr>
               <a:t>م</a:t>
@@ -2714,6 +2727,7 @@
                   <a:srgbClr val="D4AF37"/>
                 </a:solidFill>
                 <a:latin typeface="Amiri" pitchFamily="2" charset="-78"/>
+                <a:ea typeface="Amiri" pitchFamily="2" charset="-78"/>
                 <a:cs typeface="Amiri" pitchFamily="2" charset="-78"/>
               </a:rPr>
               <a:t>وَرْشَةُ الكِتَابَةِ — التَّدْرِيبُ وَالمَهَارَاتُ</a:t>
@@ -3171,6 +3185,7 @@
                   <a:srgbClr val="D4AF37"/>
                 </a:solidFill>
                 <a:latin typeface="Amiri" pitchFamily="2" charset="-78"/>
+                <a:ea typeface="Amiri" pitchFamily="2" charset="-78"/>
                 <a:cs typeface="Amiri" pitchFamily="2" charset="-78"/>
               </a:rPr>
               <a:t>م</a:t>
@@ -3491,6 +3506,7 @@
                   <a:srgbClr val="8A6D1E"/>
                 </a:solidFill>
                 <a:latin typeface="Amiri" pitchFamily="2" charset="-78"/>
+                <a:ea typeface="Amiri" pitchFamily="2" charset="-78"/>
                 <a:cs typeface="Amiri" pitchFamily="2" charset="-78"/>
               </a:rPr>
               <a:t>نَمُوذَجُ الإِجَابَةِ</a:t>
@@ -3604,6 +3620,7 @@
                   <a:srgbClr val="1F2A37"/>
                 </a:solidFill>
                 <a:latin typeface="Amiri" pitchFamily="2" charset="-78"/>
+                <a:ea typeface="Amiri" pitchFamily="2" charset="-78"/>
                 <a:cs typeface="Amiri" pitchFamily="2" charset="-78"/>
               </a:rPr>
               <a:t>إِلَى مُدِيرِ مَرْكَزِ الشَّبَابِ،</a:t>
@@ -3623,6 +3640,7 @@
                   <a:srgbClr val="1F2A37"/>
                 </a:solidFill>
                 <a:latin typeface="Amiri" pitchFamily="2" charset="-78"/>
+                <a:ea typeface="Amiri" pitchFamily="2" charset="-78"/>
                 <a:cs typeface="Amiri" pitchFamily="2" charset="-78"/>
               </a:rPr>
               <a:t>أَنَا اسْمِي حَمْزَةُ، وَعُمْرِي خَمْسَ عَشْرَةَ سَنَةً. أُرِيدُ أَنْ أُسَجِّلَ فِي دَوْرَةِ الإِسْعَافَاتِ الأَوَّلِيَّةِ الَّتِي تُقَدِّمُونَهَا فِي الصَّيْفِ. عِنْدِي شَهَادَةٌ فِي السِّبَاحَةِ، وَأَنَا مُتَطَوِّعٌ فِي نَادِي الحَيِّ. فِي السَّنَةِ المَاضِيَةِ حَضَرْتُ دَوْرَةً قَصِيرَةً فِي القِيَادَةِ، وَتَعَلَّمْتُ فِيهَا العَمَلَ الجَمَاعِيَّ. أُرِيدُ هٰذِهِ الدَّوْرَةَ لِأَنِّي أُحِبُّ مُسَاعَدَةَ النَّاسِ، وَأُرِيدُ أَنْ أَعْمَلَ مُنْقِذًا. هَلِ الدَّوْرَةُ مَجَّانِيَّةٌ؟ وَمَتَى تَبْدَأُ؟ بَعْدَ الدَّوْرَةِ سَأَتَطَوَّعُ فِي المَسْبَحِ.</a:t>
@@ -3642,6 +3660,7 @@
                   <a:srgbClr val="1F2A37"/>
                 </a:solidFill>
                 <a:latin typeface="Amiri" pitchFamily="2" charset="-78"/>
+                <a:ea typeface="Amiri" pitchFamily="2" charset="-78"/>
                 <a:cs typeface="Amiri" pitchFamily="2" charset="-78"/>
               </a:rPr>
               <a:t>مَعَ الشُّكْرِ،</a:t>
@@ -3661,6 +3680,7 @@
                   <a:srgbClr val="1F2A37"/>
                 </a:solidFill>
                 <a:latin typeface="Amiri" pitchFamily="2" charset="-78"/>
+                <a:ea typeface="Amiri" pitchFamily="2" charset="-78"/>
                 <a:cs typeface="Amiri" pitchFamily="2" charset="-78"/>
               </a:rPr>
               <a:t>حَمْزَةُ</a:t>
@@ -3824,11 +3844,12 @@
               <a:buNone/>
             </a:pPr>
             <a:r>
-              <a:rPr lang="en-US" sz="950" b="1" dirty="0">
+              <a:rPr lang="ar-SA" sz="950" b="1" dirty="0">
                 <a:solidFill>
                   <a:srgbClr val="FFFFFF"/>
                 </a:solidFill>
                 <a:latin typeface="Calibri" pitchFamily="34" charset="0"/>
+                <a:ea typeface="Amiri" pitchFamily="2" charset="-78"/>
                 <a:cs typeface="Amiri" pitchFamily="2" charset="-78"/>
               </a:rPr>
               <a:t>الَّتِي تُقَدِّمُونَهَا</a:t>
@@ -3889,11 +3910,12 @@
               <a:buNone/>
             </a:pPr>
             <a:r>
-              <a:rPr lang="en-US" sz="950" b="1" dirty="0">
+              <a:rPr lang="ar-SA" sz="950" b="1" dirty="0">
                 <a:solidFill>
                   <a:srgbClr val="FFFFFF"/>
                 </a:solidFill>
                 <a:latin typeface="Calibri" pitchFamily="34" charset="0"/>
+                <a:ea typeface="Amiri" pitchFamily="2" charset="-78"/>
                 <a:cs typeface="Amiri" pitchFamily="2" charset="-78"/>
               </a:rPr>
               <a:t>عِنْدِي شَهَادَةٌ</a:t>
@@ -3954,11 +3976,12 @@
               <a:buNone/>
             </a:pPr>
             <a:r>
-              <a:rPr lang="en-US" sz="950" b="1" dirty="0">
+              <a:rPr lang="ar-SA" sz="950" b="1" dirty="0">
                 <a:solidFill>
                   <a:srgbClr val="FFFFFF"/>
                 </a:solidFill>
                 <a:latin typeface="Calibri" pitchFamily="34" charset="0"/>
+                <a:ea typeface="Amiri" pitchFamily="2" charset="-78"/>
                 <a:cs typeface="Amiri" pitchFamily="2" charset="-78"/>
               </a:rPr>
               <a:t>حَضَرْتُ دَوْرَةً</a:t>
@@ -4019,11 +4042,12 @@
               <a:buNone/>
             </a:pPr>
             <a:r>
-              <a:rPr lang="en-US" sz="950" b="1" dirty="0">
+              <a:rPr lang="ar-SA" sz="950" b="1" dirty="0">
                 <a:solidFill>
                   <a:srgbClr val="FFFFFF"/>
                 </a:solidFill>
                 <a:latin typeface="Calibri" pitchFamily="34" charset="0"/>
+                <a:ea typeface="Amiri" pitchFamily="2" charset="-78"/>
                 <a:cs typeface="Amiri" pitchFamily="2" charset="-78"/>
               </a:rPr>
               <a:t>سَأَتَطَوَّعُ</a:t>
@@ -4157,6 +4181,7 @@
                   <a:srgbClr val="D4AF37"/>
                 </a:solidFill>
                 <a:latin typeface="Amiri" pitchFamily="2" charset="-78"/>
+                <a:ea typeface="Amiri" pitchFamily="2" charset="-78"/>
                 <a:cs typeface="Amiri" pitchFamily="2" charset="-78"/>
               </a:rPr>
               <a:t>م</a:t>
@@ -4477,6 +4502,7 @@
                   <a:srgbClr val="8A6D1E"/>
                 </a:solidFill>
                 <a:latin typeface="Amiri" pitchFamily="2" charset="-78"/>
+                <a:ea typeface="Amiri" pitchFamily="2" charset="-78"/>
                 <a:cs typeface="Amiri" pitchFamily="2" charset="-78"/>
               </a:rPr>
               <a:t>نَمُوذَجُ الإِجَابَةِ</a:t>
@@ -4590,6 +4616,7 @@
                   <a:srgbClr val="1F2A37"/>
                 </a:solidFill>
                 <a:latin typeface="Amiri" pitchFamily="2" charset="-78"/>
+                <a:ea typeface="Amiri" pitchFamily="2" charset="-78"/>
                 <a:cs typeface="Amiri" pitchFamily="2" charset="-78"/>
               </a:rPr>
               <a:t>حَضْرَةَ مُدِيرِ مَرْكَزِ الشَّبَابِ المُحْتَرَمِ،</a:t>
@@ -4609,6 +4636,7 @@
                   <a:srgbClr val="1F2A37"/>
                 </a:solidFill>
                 <a:latin typeface="Amiri" pitchFamily="2" charset="-78"/>
+                <a:ea typeface="Amiri" pitchFamily="2" charset="-78"/>
                 <a:cs typeface="Amiri" pitchFamily="2" charset="-78"/>
               </a:rPr>
               <a:t>أَوَدُّ أَنْ أُسَجِّلَ فِي دَوْرَةِ الإِسْعَافَاتِ الأَوَّلِيَّةِ الَّتِي أَعْلَنْتُمْ عَنْهَا لِلصَّيْفِ القَادِمِ. لَدَيَّ شَهَادَةٌ مُتَقَدِّمَةٌ فِي السِّبَاحَةِ، كَمَا أَنَّنِي أَتَطَوَّعُ مُنْذُ سَنَتَيْنِ فِي نَادِي الحَيِّ لِتَدْرِيبِ الأَطْفَالِ. وَقَدْ حَضَرْتُ العَامَ المَاضِي دَوْرَةً فِي القِيَادَةِ، اكْتَسَبْتُ فِيهَا مَهَارَاتٍ أَعْتَمِدُ عَلَيْهَا يَوْمِيًّا، كَتَنْظِيمِ الفَرِيقِ وَحَلِّ المُشْكِلَاتِ. وَأَرْغَبُ فِي هٰذِهِ الدَّوْرَةِ لِأَنَّ الحُصُولَ عَلَيْهَا شَرْطٌ لِلْعَمَلِ مُنْقِذًا، وَهُوَ الهَدَفُ الَّذِي أَسْعَى إِلَيْهِ. وَأَرْجُو أَنْ تُخْبِرُونِي بِمَوَاعِيدِ الدَّوْرَةِ وَتَكْلِفَتِهَا. وَبَعْدَ أَنْ أُنْهِيَهَا، سَأَتَطَوَّعُ فِي المَسْبَحِ البَلَدِيِّ طُوالَ العُطْلَةِ.</a:t>
@@ -4628,6 +4656,7 @@
                   <a:srgbClr val="1F2A37"/>
                 </a:solidFill>
                 <a:latin typeface="Amiri" pitchFamily="2" charset="-78"/>
+                <a:ea typeface="Amiri" pitchFamily="2" charset="-78"/>
                 <a:cs typeface="Amiri" pitchFamily="2" charset="-78"/>
               </a:rPr>
               <a:t>مَعَ خَالِصِ الشُّكْرِ،</a:t>
@@ -4647,6 +4676,7 @@
                   <a:srgbClr val="1F2A37"/>
                 </a:solidFill>
                 <a:latin typeface="Amiri" pitchFamily="2" charset="-78"/>
+                <a:ea typeface="Amiri" pitchFamily="2" charset="-78"/>
                 <a:cs typeface="Amiri" pitchFamily="2" charset="-78"/>
               </a:rPr>
               <a:t>حَمْزَةُ</a:t>
@@ -4810,11 +4840,12 @@
               <a:buNone/>
             </a:pPr>
             <a:r>
-              <a:rPr lang="en-US" sz="950" b="1" dirty="0">
+              <a:rPr lang="ar-SA" sz="950" b="1" dirty="0">
                 <a:solidFill>
                   <a:srgbClr val="FFFFFF"/>
                 </a:solidFill>
                 <a:latin typeface="Calibri" pitchFamily="34" charset="0"/>
+                <a:ea typeface="Amiri" pitchFamily="2" charset="-78"/>
                 <a:cs typeface="Amiri" pitchFamily="2" charset="-78"/>
               </a:rPr>
               <a:t>الَّتِي أَعْلَنْتُمْ عَنْهَا</a:t>
@@ -4875,11 +4906,12 @@
               <a:buNone/>
             </a:pPr>
             <a:r>
-              <a:rPr lang="en-US" sz="950" b="1" dirty="0">
+              <a:rPr lang="ar-SA" sz="950" b="1" dirty="0">
                 <a:solidFill>
                   <a:srgbClr val="FFFFFF"/>
                 </a:solidFill>
                 <a:latin typeface="Calibri" pitchFamily="34" charset="0"/>
+                <a:ea typeface="Amiri" pitchFamily="2" charset="-78"/>
                 <a:cs typeface="Amiri" pitchFamily="2" charset="-78"/>
               </a:rPr>
               <a:t>لَدَيَّ شَهَادَةٌ</a:t>
@@ -4940,11 +4972,12 @@
               <a:buNone/>
             </a:pPr>
             <a:r>
-              <a:rPr lang="en-US" sz="950" b="1" dirty="0">
+              <a:rPr lang="ar-SA" sz="950" b="1" dirty="0">
                 <a:solidFill>
                   <a:srgbClr val="FFFFFF"/>
                 </a:solidFill>
                 <a:latin typeface="Calibri" pitchFamily="34" charset="0"/>
+                <a:ea typeface="Amiri" pitchFamily="2" charset="-78"/>
                 <a:cs typeface="Amiri" pitchFamily="2" charset="-78"/>
               </a:rPr>
               <a:t>أَعْتَمِدُ عَلَيْهَا</a:t>
@@ -5005,11 +5038,12 @@
               <a:buNone/>
             </a:pPr>
             <a:r>
-              <a:rPr lang="en-US" sz="950" b="1" dirty="0">
+              <a:rPr lang="ar-SA" sz="950" b="1" dirty="0">
                 <a:solidFill>
                   <a:srgbClr val="FFFFFF"/>
                 </a:solidFill>
                 <a:latin typeface="Calibri" pitchFamily="34" charset="0"/>
+                <a:ea typeface="Amiri" pitchFamily="2" charset="-78"/>
                 <a:cs typeface="Amiri" pitchFamily="2" charset="-78"/>
               </a:rPr>
               <a:t>بَعْدَ أَنْ أُنْهِيَهَا</a:t>
@@ -5143,6 +5177,7 @@
                   <a:srgbClr val="D4AF37"/>
                 </a:solidFill>
                 <a:latin typeface="Amiri" pitchFamily="2" charset="-78"/>
+                <a:ea typeface="Amiri" pitchFamily="2" charset="-78"/>
                 <a:cs typeface="Amiri" pitchFamily="2" charset="-78"/>
               </a:rPr>
               <a:t>م</a:t>
@@ -5463,6 +5498,7 @@
                   <a:srgbClr val="8A6D1E"/>
                 </a:solidFill>
                 <a:latin typeface="Amiri" pitchFamily="2" charset="-78"/>
+                <a:ea typeface="Amiri" pitchFamily="2" charset="-78"/>
                 <a:cs typeface="Amiri" pitchFamily="2" charset="-78"/>
               </a:rPr>
               <a:t>اخْتَرْ عُنْوَانًا وَاحِدًا</a:t>
@@ -5743,6 +5779,7 @@
                   <a:srgbClr val="1B3B6F"/>
                 </a:solidFill>
                 <a:latin typeface="Amiri" pitchFamily="2" charset="-78"/>
+                <a:ea typeface="Amiri" pitchFamily="2" charset="-78"/>
                 <a:cs typeface="Amiri" pitchFamily="2" charset="-78"/>
               </a:rPr>
               <a:t>مَهَارَاتِي وَمُؤَهِّلَاتِي</a:t>
@@ -5781,6 +5818,7 @@
                   <a:srgbClr val="1B3B6F"/>
                 </a:solidFill>
                 <a:latin typeface="Amiri" pitchFamily="2" charset="-78"/>
+                <a:ea typeface="Amiri" pitchFamily="2" charset="-78"/>
                 <a:cs typeface="Amiri" pitchFamily="2" charset="-78"/>
               </a:rPr>
               <a:t>(أ)</a:t>
@@ -5887,6 +5925,7 @@
                   <a:srgbClr val="1B3B6F"/>
                 </a:solidFill>
                 <a:latin typeface="Amiri" pitchFamily="2" charset="-78"/>
+                <a:ea typeface="Amiri" pitchFamily="2" charset="-78"/>
                 <a:cs typeface="Amiri" pitchFamily="2" charset="-78"/>
               </a:rPr>
               <a:t>الشَّهَادَاتُ الَّتِي لَدَيْكَ · المَهَارَاتُ الَّتِي تَتَعَلَّمُهَا · دَوْرَةٌ أَوْ تَجْرِبَةٌ مُفِيدَةٌ · رَأْيُكَ وَخِطَطُكَ</a:t>
@@ -6018,6 +6057,7 @@
                   <a:srgbClr val="1B3B6F"/>
                 </a:solidFill>
                 <a:latin typeface="Amiri" pitchFamily="2" charset="-78"/>
+                <a:ea typeface="Amiri" pitchFamily="2" charset="-78"/>
                 <a:cs typeface="Amiri" pitchFamily="2" charset="-78"/>
               </a:rPr>
               <a:t>الجَامِعَةُ أَمِ التَّدْرِيبُ المِهْنِيُّ؟</a:t>
@@ -6056,6 +6096,7 @@
                   <a:srgbClr val="1B3B6F"/>
                 </a:solidFill>
                 <a:latin typeface="Amiri" pitchFamily="2" charset="-78"/>
+                <a:ea typeface="Amiri" pitchFamily="2" charset="-78"/>
                 <a:cs typeface="Amiri" pitchFamily="2" charset="-78"/>
               </a:rPr>
               <a:t>(ب)</a:t>
@@ -6159,6 +6200,7 @@
                   <a:srgbClr val="1B3B6F"/>
                 </a:solidFill>
                 <a:latin typeface="Amiri" pitchFamily="2" charset="-78"/>
+                <a:ea typeface="Amiri" pitchFamily="2" charset="-78"/>
                 <a:cs typeface="Amiri" pitchFamily="2" charset="-78"/>
               </a:rPr>
               <a:t>الطَّرِيقُ التَّقْلِيدِيُّ · مَزَايَا كُلِّ طَرِيقٍ · مِثَالٌ مِنَ الوَاقِعِ · رَأْيُكَ</a:t>
@@ -6358,6 +6400,7 @@
                   <a:srgbClr val="D4AF37"/>
                 </a:solidFill>
                 <a:latin typeface="Amiri" pitchFamily="2" charset="-78"/>
+                <a:ea typeface="Amiri" pitchFamily="2" charset="-78"/>
                 <a:cs typeface="Amiri" pitchFamily="2" charset="-78"/>
               </a:rPr>
               <a:t>م</a:t>
@@ -6678,6 +6721,7 @@
                   <a:srgbClr val="8A6D1E"/>
                 </a:solidFill>
                 <a:latin typeface="Amiri" pitchFamily="2" charset="-78"/>
+                <a:ea typeface="Amiri" pitchFamily="2" charset="-78"/>
                 <a:cs typeface="Amiri" pitchFamily="2" charset="-78"/>
               </a:rPr>
               <a:t>خُطَّةُ الكِتَابَةِ</a:t>
@@ -7302,6 +7346,7 @@
                   <a:srgbClr val="1B3B6F"/>
                 </a:solidFill>
                 <a:latin typeface="Amiri" pitchFamily="2" charset="-78"/>
+                <a:ea typeface="Amiri" pitchFamily="2" charset="-78"/>
                 <a:cs typeface="Amiri" pitchFamily="2" charset="-78"/>
               </a:rPr>
               <a:t>عِنْدِي شَهَادَةٌ فِي السِّبَاحَةِ، وَأَتَطَوَّعُ فِي المَكْتَبَةِ.</a:t>
@@ -7401,6 +7446,7 @@
                   <a:srgbClr val="1B3B6F"/>
                 </a:solidFill>
                 <a:latin typeface="Amiri" pitchFamily="2" charset="-78"/>
+                <a:ea typeface="Amiri" pitchFamily="2" charset="-78"/>
                 <a:cs typeface="Amiri" pitchFamily="2" charset="-78"/>
               </a:rPr>
               <a:t>حَضَرْتُ دَوْرَةً فِي البَرْمَجَةِ، وَحَصَلْتُ عَلَى شَهَادَةٍ.</a:t>
@@ -7500,6 +7546,7 @@
                   <a:srgbClr val="1B3B6F"/>
                 </a:solidFill>
                 <a:latin typeface="Amiri" pitchFamily="2" charset="-78"/>
+                <a:ea typeface="Amiri" pitchFamily="2" charset="-78"/>
                 <a:cs typeface="Amiri" pitchFamily="2" charset="-78"/>
               </a:rPr>
               <a:t>بَعْدَ أَنْ أُنْهِيَ المَدْرَسَةَ، سَأَدْرُسُ فِي الجَامِعَةِ.</a:t>
@@ -7661,6 +7708,7 @@
                   <a:srgbClr val="1F2A37"/>
                 </a:solidFill>
                 <a:latin typeface="Amiri" pitchFamily="2" charset="-78"/>
+                <a:ea typeface="Amiri" pitchFamily="2" charset="-78"/>
                 <a:cs typeface="Amiri" pitchFamily="2" charset="-78"/>
               </a:rPr>
               <a:t>أ</a:t>
@@ -7687,6 +7735,7 @@
                   <a:srgbClr val="1F2A37"/>
                 </a:solidFill>
                 <a:latin typeface="Amiri" pitchFamily="2" charset="-78"/>
+                <a:ea typeface="Amiri" pitchFamily="2" charset="-78"/>
                 <a:cs typeface="Amiri" pitchFamily="2" charset="-78"/>
               </a:rPr>
               <a:t>ب</a:t>
@@ -7833,6 +7882,7 @@
                   <a:srgbClr val="D4AF37"/>
                 </a:solidFill>
                 <a:latin typeface="Amiri" pitchFamily="2" charset="-78"/>
+                <a:ea typeface="Amiri" pitchFamily="2" charset="-78"/>
                 <a:cs typeface="Amiri" pitchFamily="2" charset="-78"/>
               </a:rPr>
               <a:t>م</a:t>
@@ -8090,6 +8140,7 @@
                   <a:srgbClr val="8A6D1E"/>
                 </a:solidFill>
                 <a:latin typeface="Amiri" pitchFamily="2" charset="-78"/>
+                <a:ea typeface="Amiri" pitchFamily="2" charset="-78"/>
                 <a:cs typeface="Amiri" pitchFamily="2" charset="-78"/>
               </a:rPr>
               <a:t>أ</a:t>
@@ -8154,6 +8205,7 @@
                   <a:srgbClr val="1B3B6F"/>
                 </a:solidFill>
                 <a:latin typeface="Amiri" pitchFamily="2" charset="-78"/>
+                <a:ea typeface="Amiri" pitchFamily="2" charset="-78"/>
                 <a:cs typeface="Amiri" pitchFamily="2" charset="-78"/>
               </a:rPr>
               <a:t>أ</a:t>
@@ -8205,6 +8257,7 @@
                   <a:srgbClr val="8A6D1E"/>
                 </a:solidFill>
                 <a:latin typeface="Amiri" pitchFamily="2" charset="-78"/>
+                <a:ea typeface="Amiri" pitchFamily="2" charset="-78"/>
                 <a:cs typeface="Amiri" pitchFamily="2" charset="-78"/>
               </a:rPr>
               <a:t>نَمُوذَجُ الإِجَابَةِ</a:t>
@@ -8318,6 +8371,7 @@
                   <a:srgbClr val="1F2A37"/>
                 </a:solidFill>
                 <a:latin typeface="Amiri" pitchFamily="2" charset="-78"/>
+                <a:ea typeface="Amiri" pitchFamily="2" charset="-78"/>
                 <a:cs typeface="Amiri" pitchFamily="2" charset="-78"/>
               </a:rPr>
               <a:t>أَنَا فِي الصَّفِّ الحَادِي عَشَرَ، وَأُفَكِّرُ كَثِيرًا فِي مُسْتَقْبَلِي. عِنْدِي بَعْضُ الشَّهَادَاتِ: شَهَادَةٌ فِي السِّبَاحَةِ، وَشَهَادَةٌ فِي الإِسْعَافَاتِ الأَوَّلِيَّةِ. أَتَطَوَّعُ أَيْضًا فِي مَكْتَبَةِ الحَيِّ يَوْمَ السَّبْتِ، وَأُسَاعِدُ الأَطْفَالَ الصِّغَارَ عَلَى القِرَاءَةِ وَالكِتَابَةِ.</a:t>
@@ -8337,6 +8391,7 @@
                   <a:srgbClr val="1F2A37"/>
                 </a:solidFill>
                 <a:latin typeface="Amiri" pitchFamily="2" charset="-78"/>
+                <a:ea typeface="Amiri" pitchFamily="2" charset="-78"/>
                 <a:cs typeface="Amiri" pitchFamily="2" charset="-78"/>
               </a:rPr>
               <a:t>المَهَارَاتُ الَّتِي أَتَعَلَّمُهَا فِي المَدْرَسَةِ مُفِيدَةٌ جِدًّا، مِثْلَ العَمَلِ الجَمَاعِيِّ وَالتَّقْدِيمِ أَمَامَ الصَّفِّ. أَنَا مُنَظَّمٌ وَصَبُورٌ، وَأُحِبُّ التَّوَاصُلَ مَعَ النَّاسِ. هٰذِهِ المَهَارَاتُ سَتُسَاعِدُنِي فِي العَمَلِ.</a:t>
@@ -8356,6 +8411,7 @@
                   <a:srgbClr val="1F2A37"/>
                 </a:solidFill>
                 <a:latin typeface="Amiri" pitchFamily="2" charset="-78"/>
+                <a:ea typeface="Amiri" pitchFamily="2" charset="-78"/>
                 <a:cs typeface="Amiri" pitchFamily="2" charset="-78"/>
               </a:rPr>
               <a:t>فِي الصَّيْفِ المَاضِي حَضَرْتُ دَوْرَةً فِي البَرْمَجَةِ لِمُدَّةِ أُسْبُوعَيْنِ. كَانَتِ الدَّوْرَةُ صَعْبَةً فِي البِدَايَةِ، لٰكِنِّي صَنَعْتُ لُعْبَةً صَغِيرَةً فِي النِّهَايَةِ، وَحَصَلْتُ عَلَى شَهَادَةٍ. كُنْتُ فَخُورًا جِدًّا، وَأَرَيْتُ اللُّعْبَةَ لِأُسْرَتِي.</a:t>
@@ -8375,6 +8431,7 @@
                   <a:srgbClr val="1F2A37"/>
                 </a:solidFill>
                 <a:latin typeface="Amiri" pitchFamily="2" charset="-78"/>
+                <a:ea typeface="Amiri" pitchFamily="2" charset="-78"/>
                 <a:cs typeface="Amiri" pitchFamily="2" charset="-78"/>
               </a:rPr>
               <a:t>فِي رَأْيِي، الشَّهَادَاتُ مُهِمَّةٌ، لٰكِنَّ المَهَارَاتِ وَالخِبْرَةَ أَهَمُّ. بَعْدَ أَنْ أُنْهِيَ المَدْرَسَةَ، سَأَدْرُسُ عُلُومَ الحَاسُوبِ فِي الجَامِعَةِ، وَسَأَتَدَرَّبُ فِي شَرِكَةٍ كَبِيرَةٍ فِي الصَّيْفِ، لِأَكْتَسِبَ الخِبْرَةَ.</a:t>
@@ -8538,11 +8595,12 @@
               <a:buNone/>
             </a:pPr>
             <a:r>
-              <a:rPr lang="en-US" sz="950" b="1" dirty="0">
+              <a:rPr lang="ar-SA" sz="950" b="1" dirty="0">
                 <a:solidFill>
                   <a:srgbClr val="FFFFFF"/>
                 </a:solidFill>
                 <a:latin typeface="Calibri" pitchFamily="34" charset="0"/>
+                <a:ea typeface="Amiri" pitchFamily="2" charset="-78"/>
                 <a:cs typeface="Amiri" pitchFamily="2" charset="-78"/>
               </a:rPr>
               <a:t>عِنْدِي بَعْضُ الشَّهَادَاتِ</a:t>
@@ -8603,11 +8661,12 @@
               <a:buNone/>
             </a:pPr>
             <a:r>
-              <a:rPr lang="en-US" sz="950" b="1" dirty="0">
+              <a:rPr lang="ar-SA" sz="950" b="1" dirty="0">
                 <a:solidFill>
                   <a:srgbClr val="FFFFFF"/>
                 </a:solidFill>
                 <a:latin typeface="Calibri" pitchFamily="34" charset="0"/>
+                <a:ea typeface="Amiri" pitchFamily="2" charset="-78"/>
                 <a:cs typeface="Amiri" pitchFamily="2" charset="-78"/>
               </a:rPr>
               <a:t>الَّتِي أَتَعَلَّمُهَا</a:t>
@@ -8668,11 +8727,12 @@
               <a:buNone/>
             </a:pPr>
             <a:r>
-              <a:rPr lang="en-US" sz="950" b="1" dirty="0">
+              <a:rPr lang="ar-SA" sz="950" b="1" dirty="0">
                 <a:solidFill>
                   <a:srgbClr val="FFFFFF"/>
                 </a:solidFill>
                 <a:latin typeface="Calibri" pitchFamily="34" charset="0"/>
+                <a:ea typeface="Amiri" pitchFamily="2" charset="-78"/>
                 <a:cs typeface="Amiri" pitchFamily="2" charset="-78"/>
               </a:rPr>
               <a:t>حَصَلْتُ عَلَى شَهَادَةٍ</a:t>
@@ -8733,11 +8793,12 @@
               <a:buNone/>
             </a:pPr>
             <a:r>
-              <a:rPr lang="en-US" sz="950" b="1" dirty="0">
+              <a:rPr lang="ar-SA" sz="950" b="1" dirty="0">
                 <a:solidFill>
                   <a:srgbClr val="FFFFFF"/>
                 </a:solidFill>
                 <a:latin typeface="Calibri" pitchFamily="34" charset="0"/>
+                <a:ea typeface="Amiri" pitchFamily="2" charset="-78"/>
                 <a:cs typeface="Amiri" pitchFamily="2" charset="-78"/>
               </a:rPr>
               <a:t>بَعْدَ أَنْ أُنْهِيَ</a:t>
@@ -8871,6 +8932,7 @@
                   <a:srgbClr val="D4AF37"/>
                 </a:solidFill>
                 <a:latin typeface="Amiri" pitchFamily="2" charset="-78"/>
+                <a:ea typeface="Amiri" pitchFamily="2" charset="-78"/>
                 <a:cs typeface="Amiri" pitchFamily="2" charset="-78"/>
               </a:rPr>
               <a:t>م</a:t>
@@ -9128,6 +9190,7 @@
                   <a:srgbClr val="8A6D1E"/>
                 </a:solidFill>
                 <a:latin typeface="Amiri" pitchFamily="2" charset="-78"/>
+                <a:ea typeface="Amiri" pitchFamily="2" charset="-78"/>
                 <a:cs typeface="Amiri" pitchFamily="2" charset="-78"/>
               </a:rPr>
               <a:t>أ</a:t>
@@ -9192,6 +9255,7 @@
                   <a:srgbClr val="1B3B6F"/>
                 </a:solidFill>
                 <a:latin typeface="Amiri" pitchFamily="2" charset="-78"/>
+                <a:ea typeface="Amiri" pitchFamily="2" charset="-78"/>
                 <a:cs typeface="Amiri" pitchFamily="2" charset="-78"/>
               </a:rPr>
               <a:t>أ</a:t>
@@ -9243,6 +9307,7 @@
                   <a:srgbClr val="8A6D1E"/>
                 </a:solidFill>
                 <a:latin typeface="Amiri" pitchFamily="2" charset="-78"/>
+                <a:ea typeface="Amiri" pitchFamily="2" charset="-78"/>
                 <a:cs typeface="Amiri" pitchFamily="2" charset="-78"/>
               </a:rPr>
               <a:t>نَمُوذَجُ الإِجَابَةِ</a:t>
@@ -9356,6 +9421,7 @@
                   <a:srgbClr val="1F2A37"/>
                 </a:solidFill>
                 <a:latin typeface="Amiri" pitchFamily="2" charset="-78"/>
+                <a:ea typeface="Amiri" pitchFamily="2" charset="-78"/>
                 <a:cs typeface="Amiri" pitchFamily="2" charset="-78"/>
               </a:rPr>
               <a:t>يُقَالُ إِنَّ الشَّهَادَةَ تَفْتَحُ البَابَ، أَمَّا المَهَارَاتُ فَهِيَ الَّتِي تُبْقِيكَ فِي الغُرْفَةِ. وَقَدْ أَدْرَكْتُ صِدْقَ هٰذِهِ العِبَارَةِ مُبَكِّرًا، فَحَرَصْتُ عَلَى أَنْ أَبْنِيَ مَهَارَاتِي خَارِجَ الفَصْلِ بِقَدْرِ مَا أَبْنِيهَا دَاخِلَهُ، بِالتَّطَوُّعِ وَالدَّوْرَاتِ القَصِيرَةِ.</a:t>
@@ -9375,6 +9441,7 @@
                   <a:srgbClr val="1F2A37"/>
                 </a:solidFill>
                 <a:latin typeface="Amiri" pitchFamily="2" charset="-78"/>
+                <a:ea typeface="Amiri" pitchFamily="2" charset="-78"/>
                 <a:cs typeface="Amiri" pitchFamily="2" charset="-78"/>
               </a:rPr>
               <a:t>لَدَيَّ اليَوْمَ شَهَادَتَانِ أَعْتَزُّ بِهِمَا: الأُولَى فِي الإِسْعَافَاتِ الأَوَّلِيَّةِ، وَالثَّانِيَةُ فِي البَرْمَجَةِ. غَيْرَ أَنَّ أَهَمَّ مَا تَعَلَّمْتُهُ لَمْ يَأْتِ مِنْ دَوْرَةٍ، بَلْ مِنْ تَطَوُّعِي فِي مُسْتَشْفَى الأَطْفَالِ؛ فَهُنَاكَ تَعَلَّمْتُ الصَّبْرَ، وَالاسْتِمَاعَ، وَالتَّصَرُّفَ بِهُدُوءٍ فِي المَوَاقِفِ الصَّعْبَةِ.</a:t>
@@ -9394,6 +9461,7 @@
                   <a:srgbClr val="1F2A37"/>
                 </a:solidFill>
                 <a:latin typeface="Amiri" pitchFamily="2" charset="-78"/>
+                <a:ea typeface="Amiri" pitchFamily="2" charset="-78"/>
                 <a:cs typeface="Amiri" pitchFamily="2" charset="-78"/>
               </a:rPr>
               <a:t>وَأَذْكُرُ يَوْمًا انْهَارَ فِيهِ طِفْلٌ بِالبُكَاءِ لِأَنَّهُ خَافَ مِنَ الإِبْرَةِ، فَجَلَسْتُ مَعَهُ وَحَكَيْتُ لَهُ قِصَّةً حَتَّى هَدَأَ، وَشَكَرَتْنِي المُمَرِّضَةُ أَمَامَ الجَمِيعِ، وَقَالَتْ إِنَّنِي سَأَكُونُ مُمَرِّضًا مُمْتَازًا. عِنْدَهَا عَرَفْتُ أَنَّ هٰذِهِ المَهَارَاتِ لَا تُدَرَّسُ فِي الكُتُبِ.</a:t>
@@ -9413,6 +9481,7 @@
                   <a:srgbClr val="1F2A37"/>
                 </a:solidFill>
                 <a:latin typeface="Amiri" pitchFamily="2" charset="-78"/>
+                <a:ea typeface="Amiri" pitchFamily="2" charset="-78"/>
                 <a:cs typeface="Amiri" pitchFamily="2" charset="-78"/>
               </a:rPr>
               <a:t>صَحِيحٌ أَنَّ الشَّهَادَاتِ ضَرُورِيَّةٌ لِلْقَبُولِ فِي الجَامِعَةِ، غَيْرَ أَنَّ الخِبْرَةَ تَصْنَعُ الإِنْسَانَ. وَإِذَا قُبِلْتُ فِي كُلِّيَّةِ التَّمْرِيضِ كَمَا أَتَمَنَّى، فَسَأُوَاصِلُ التَّطَوُّعَ، لِأَنَّ التَّعَلُّمَ الحَقِيقِيَّ لَا يَتَوَقَّفُ أَبَدًا.</a:t>
@@ -9511,11 +9580,12 @@
               <a:buNone/>
             </a:pPr>
             <a:r>
-              <a:rPr lang="en-US" sz="950" b="1" dirty="0">
+              <a:rPr lang="ar-SA" sz="950" b="1" dirty="0">
                 <a:solidFill>
                   <a:srgbClr val="FFFFFF"/>
                 </a:solidFill>
                 <a:latin typeface="Calibri" pitchFamily="34" charset="0"/>
+                <a:ea typeface="Amiri" pitchFamily="2" charset="-78"/>
                 <a:cs typeface="Amiri" pitchFamily="2" charset="-78"/>
               </a:rPr>
               <a:t>يُقَالُ إِنَّ</a:t>
@@ -9576,11 +9646,12 @@
               <a:buNone/>
             </a:pPr>
             <a:r>
-              <a:rPr lang="en-US" sz="950" b="1" dirty="0">
+              <a:rPr lang="ar-SA" sz="950" b="1" dirty="0">
                 <a:solidFill>
                   <a:srgbClr val="FFFFFF"/>
                 </a:solidFill>
                 <a:latin typeface="Calibri" pitchFamily="34" charset="0"/>
+                <a:ea typeface="Amiri" pitchFamily="2" charset="-78"/>
                 <a:cs typeface="Amiri" pitchFamily="2" charset="-78"/>
               </a:rPr>
               <a:t>شَهَادَتَانِ أَعْتَزُّ بِهِمَا</a:t>
@@ -9641,11 +9712,12 @@
               <a:buNone/>
             </a:pPr>
             <a:r>
-              <a:rPr lang="en-US" sz="950" b="1" dirty="0">
+              <a:rPr lang="ar-SA" sz="950" b="1" dirty="0">
                 <a:solidFill>
                   <a:srgbClr val="FFFFFF"/>
                 </a:solidFill>
                 <a:latin typeface="Calibri" pitchFamily="34" charset="0"/>
+                <a:ea typeface="Amiri" pitchFamily="2" charset="-78"/>
                 <a:cs typeface="Amiri" pitchFamily="2" charset="-78"/>
               </a:rPr>
               <a:t>لَمْ يَأْتِ … بَلْ</a:t>
@@ -9706,11 +9778,12 @@
               <a:buNone/>
             </a:pPr>
             <a:r>
-              <a:rPr lang="en-US" sz="950" b="1" dirty="0">
+              <a:rPr lang="ar-SA" sz="950" b="1" dirty="0">
                 <a:solidFill>
                   <a:srgbClr val="FFFFFF"/>
                 </a:solidFill>
                 <a:latin typeface="Calibri" pitchFamily="34" charset="0"/>
+                <a:ea typeface="Amiri" pitchFamily="2" charset="-78"/>
                 <a:cs typeface="Amiri" pitchFamily="2" charset="-78"/>
               </a:rPr>
               <a:t>إِذَا قُبِلْتُ … فَسَأُوَاصِلُ</a:t>
@@ -9844,6 +9917,7 @@
                   <a:srgbClr val="D4AF37"/>
                 </a:solidFill>
                 <a:latin typeface="Amiri" pitchFamily="2" charset="-78"/>
+                <a:ea typeface="Amiri" pitchFamily="2" charset="-78"/>
                 <a:cs typeface="Amiri" pitchFamily="2" charset="-78"/>
               </a:rPr>
               <a:t>م</a:t>
@@ -10101,6 +10175,7 @@
                   <a:srgbClr val="8A6D1E"/>
                 </a:solidFill>
                 <a:latin typeface="Amiri" pitchFamily="2" charset="-78"/>
+                <a:ea typeface="Amiri" pitchFamily="2" charset="-78"/>
                 <a:cs typeface="Amiri" pitchFamily="2" charset="-78"/>
               </a:rPr>
               <a:t>ب</a:t>
@@ -10165,6 +10240,7 @@
                   <a:srgbClr val="1B3B6F"/>
                 </a:solidFill>
                 <a:latin typeface="Amiri" pitchFamily="2" charset="-78"/>
+                <a:ea typeface="Amiri" pitchFamily="2" charset="-78"/>
                 <a:cs typeface="Amiri" pitchFamily="2" charset="-78"/>
               </a:rPr>
               <a:t>ب</a:t>
@@ -10216,6 +10292,7 @@
                   <a:srgbClr val="8A6D1E"/>
                 </a:solidFill>
                 <a:latin typeface="Amiri" pitchFamily="2" charset="-78"/>
+                <a:ea typeface="Amiri" pitchFamily="2" charset="-78"/>
                 <a:cs typeface="Amiri" pitchFamily="2" charset="-78"/>
               </a:rPr>
               <a:t>نَمُوذَجُ الإِجَابَةِ</a:t>
@@ -10329,6 +10406,7 @@
                   <a:srgbClr val="1F2A37"/>
                 </a:solidFill>
                 <a:latin typeface="Amiri" pitchFamily="2" charset="-78"/>
+                <a:ea typeface="Amiri" pitchFamily="2" charset="-78"/>
                 <a:cs typeface="Amiri" pitchFamily="2" charset="-78"/>
               </a:rPr>
               <a:t>لِسَنَوَاتٍ طَوِيلَةٍ، كَانَتِ الجَامِعَةُ هِيَ الطَّرِيقَ الوَحِيدَ الَّذِي يَرَاهُ الأَهْلُ لِأَبْنَائِهِمْ المُتَفَوِّقِينَ. أَمَّا اليَوْمَ، فَيَتَسَاءَلُ كَثِيرٌ مِنَ الشَّبَابِ: هَلْ تَسْتَحِقُّ الشَّهَادَةُ الجَامِعِيَّةُ الوَقْتَ وَالمَالَ اللَّذَيْنِ تَتَطَلَّبُهُمَا؟</a:t>
@@ -10348,6 +10426,7 @@
                   <a:srgbClr val="1F2A37"/>
                 </a:solidFill>
                 <a:latin typeface="Amiri" pitchFamily="2" charset="-78"/>
+                <a:ea typeface="Amiri" pitchFamily="2" charset="-78"/>
                 <a:cs typeface="Amiri" pitchFamily="2" charset="-78"/>
               </a:rPr>
               <a:t>مِنْ نَاحِيَةٍ، تَبْقَى الجَامِعَةُ ضَرُورِيَّةً لِمِهَنٍ كَالطِّبِّ وَالهَنْدَسَةِ وَالقَانُونِ، كَمَا أَنَّهَا تُنَمِّي التَّفْكِيرَ النَّقْدِيَّ وَالبَحْثَ. وَمِنْ نَاحِيَةٍ أُخْرَى، يُتِيحُ التَّدْرِيبُ المِهْنِيُّ لِلطَّالِبِ أَنْ يَكْسِبَ رَاتِبًا وَهُوَ يَتَعَلَّمُ، مِمَّا يُجَنِّبُهُ دُيُونًا قَدْ تُلَاحِقُهُ سَنَوَاتٍ، وَيَمْنَحُهُ خِبْرَةً عَمَلِيَّةً يَطْلُبُهَا أَصْحَابُ العَمَلِ.</a:t>
@@ -10367,6 +10446,7 @@
                   <a:srgbClr val="1F2A37"/>
                 </a:solidFill>
                 <a:latin typeface="Amiri" pitchFamily="2" charset="-78"/>
+                <a:ea typeface="Amiri" pitchFamily="2" charset="-78"/>
                 <a:cs typeface="Amiri" pitchFamily="2" charset="-78"/>
               </a:rPr>
               <a:t>وَقَدْ رَأَيْتُ الطَّرِيقَيْنِ فِي أُسْرَتِي؛ فَأَخِي الأَكْبَرُ تَخَرَّجَ فِي الجَامِعَةِ بِشَهَادَةٍ فِي التَّارِيخِ، وَظَلَّ عَامًا كَامِلًا يَبْحَثُ عَنْ عَمَلٍ مُنَاسِبٍ دُونَ جَدْوَى، بَيْنَمَا اخْتَارَ ابْنُ عَمِّي تَدْرِيبًا فِي الكَهْرَبَاءِ، فَأَصْبَحَ اليَوْمَ يُدِيرُ شَرِكَتَهُ الصَّغِيرَةَ، وَيُوَظِّفُ ثَلَاثَةَ عُمَّالٍ.</a:t>
@@ -10386,6 +10466,7 @@
                   <a:srgbClr val="1F2A37"/>
                 </a:solidFill>
                 <a:latin typeface="Amiri" pitchFamily="2" charset="-78"/>
+                <a:ea typeface="Amiri" pitchFamily="2" charset="-78"/>
                 <a:cs typeface="Amiri" pitchFamily="2" charset="-78"/>
               </a:rPr>
               <a:t>صَحِيحٌ أَنَّ لِكُلِّ طَرِيقٍ مَزَايَاهُ وَعُيُوبَهُ، غَيْرَ أَنَّ الخَطَأَ أَنْ نَعْتَبِرَ أَحَدَهُمَا أَفْضَلَ دَائِمًا. وَلَوْ عَامَلَ المُجْتَمَعُ التَّدْرِيبَ المِهْنِيَّ بِالاحْتِرَامِ نَفْسِهِ، لَاخْتَارَ كُلُّ شَابٍّ الطَّرِيقَ الَّذِي يُنَاسِبُ مَوَاهِبَهُ وَأَحْلَامَهُ حَقًّا.</a:t>
@@ -10484,11 +10565,12 @@
               <a:buNone/>
             </a:pPr>
             <a:r>
-              <a:rPr lang="en-US" sz="950" b="1" dirty="0">
+              <a:rPr lang="ar-SA" sz="950" b="1" dirty="0">
                 <a:solidFill>
                   <a:srgbClr val="FFFFFF"/>
                 </a:solidFill>
                 <a:latin typeface="Calibri" pitchFamily="34" charset="0"/>
+                <a:ea typeface="Amiri" pitchFamily="2" charset="-78"/>
                 <a:cs typeface="Amiri" pitchFamily="2" charset="-78"/>
               </a:rPr>
               <a:t>اللَّذَيْنِ تَتَطَلَّبُهُمَا</a:t>
@@ -10549,11 +10631,12 @@
               <a:buNone/>
             </a:pPr>
             <a:r>
-              <a:rPr lang="en-US" sz="950" b="1" dirty="0">
+              <a:rPr lang="ar-SA" sz="950" b="1" dirty="0">
                 <a:solidFill>
                   <a:srgbClr val="FFFFFF"/>
                 </a:solidFill>
                 <a:latin typeface="Calibri" pitchFamily="34" charset="0"/>
+                <a:ea typeface="Amiri" pitchFamily="2" charset="-78"/>
                 <a:cs typeface="Amiri" pitchFamily="2" charset="-78"/>
               </a:rPr>
               <a:t>وَهُوَ يَتَعَلَّمُ</a:t>
@@ -10614,11 +10697,12 @@
               <a:buNone/>
             </a:pPr>
             <a:r>
-              <a:rPr lang="en-US" sz="950" b="1" dirty="0">
+              <a:rPr lang="ar-SA" sz="950" b="1" dirty="0">
                 <a:solidFill>
                   <a:srgbClr val="FFFFFF"/>
                 </a:solidFill>
                 <a:latin typeface="Calibri" pitchFamily="34" charset="0"/>
+                <a:ea typeface="Amiri" pitchFamily="2" charset="-78"/>
                 <a:cs typeface="Amiri" pitchFamily="2" charset="-78"/>
               </a:rPr>
               <a:t>بَيْنَمَا اخْتَارَ</a:t>
@@ -10679,11 +10763,12 @@
               <a:buNone/>
             </a:pPr>
             <a:r>
-              <a:rPr lang="en-US" sz="950" b="1" dirty="0">
+              <a:rPr lang="ar-SA" sz="950" b="1" dirty="0">
                 <a:solidFill>
                   <a:srgbClr val="FFFFFF"/>
                 </a:solidFill>
                 <a:latin typeface="Calibri" pitchFamily="34" charset="0"/>
+                <a:ea typeface="Amiri" pitchFamily="2" charset="-78"/>
                 <a:cs typeface="Amiri" pitchFamily="2" charset="-78"/>
               </a:rPr>
               <a:t>لَوْ عَامَلَ … لَاخْتَارَ</a:t>
@@ -10817,6 +10902,7 @@
                   <a:srgbClr val="D4AF37"/>
                 </a:solidFill>
                 <a:latin typeface="Amiri" pitchFamily="2" charset="-78"/>
+                <a:ea typeface="Amiri" pitchFamily="2" charset="-78"/>
                 <a:cs typeface="Amiri" pitchFamily="2" charset="-78"/>
               </a:rPr>
               <a:t>م</a:t>
@@ -11137,6 +11223,7 @@
                   <a:srgbClr val="8A6D1E"/>
                 </a:solidFill>
                 <a:latin typeface="Amiri" pitchFamily="2" charset="-78"/>
+                <a:ea typeface="Amiri" pitchFamily="2" charset="-78"/>
                 <a:cs typeface="Amiri" pitchFamily="2" charset="-78"/>
               </a:rPr>
               <a:t>قَيِّمْ عَمَلَكَ</a:t>
@@ -12381,6 +12468,7 @@
                   <a:srgbClr val="FFFFFF"/>
                 </a:solidFill>
                 <a:latin typeface="Amiri" pitchFamily="2" charset="-78"/>
+                <a:ea typeface="Amiri" pitchFamily="2" charset="-78"/>
                 <a:cs typeface="Amiri" pitchFamily="2" charset="-78"/>
               </a:rPr>
               <a:t>أَحْسَنْتُمْ! إِلَى اللِّقَاءِ</a:t>
@@ -12533,6 +12621,7 @@
                   <a:srgbClr val="D4AF37"/>
                 </a:solidFill>
                 <a:latin typeface="Amiri" pitchFamily="2" charset="-78"/>
+                <a:ea typeface="Amiri" pitchFamily="2" charset="-78"/>
                 <a:cs typeface="Amiri" pitchFamily="2" charset="-78"/>
               </a:rPr>
               <a:t>وَرْشَةُ التَّدْرِيبِ</a:t>
@@ -12666,6 +12755,7 @@
                   <a:srgbClr val="D4AF37"/>
                 </a:solidFill>
                 <a:latin typeface="Amiri" pitchFamily="2" charset="-78"/>
+                <a:ea typeface="Amiri" pitchFamily="2" charset="-78"/>
                 <a:cs typeface="Amiri" pitchFamily="2" charset="-78"/>
               </a:rPr>
               <a:t>م</a:t>
@@ -12986,6 +13076,7 @@
                   <a:srgbClr val="8A6D1E"/>
                 </a:solidFill>
                 <a:latin typeface="Amiri" pitchFamily="2" charset="-78"/>
+                <a:ea typeface="Amiri" pitchFamily="2" charset="-78"/>
                 <a:cs typeface="Amiri" pitchFamily="2" charset="-78"/>
               </a:rPr>
               <a:t>آدَابُ الصَّفِّ</a:t>
@@ -14517,6 +14608,7 @@
                   <a:srgbClr val="D4AF37"/>
                 </a:solidFill>
                 <a:latin typeface="Amiri" pitchFamily="2" charset="-78"/>
+                <a:ea typeface="Amiri" pitchFamily="2" charset="-78"/>
                 <a:cs typeface="Amiri" pitchFamily="2" charset="-78"/>
               </a:rPr>
               <a:t>م</a:t>
@@ -14837,6 +14929,7 @@
                   <a:srgbClr val="8A6D1E"/>
                 </a:solidFill>
                 <a:latin typeface="Amiri" pitchFamily="2" charset="-78"/>
+                <a:ea typeface="Amiri" pitchFamily="2" charset="-78"/>
                 <a:cs typeface="Amiri" pitchFamily="2" charset="-78"/>
               </a:rPr>
               <a:t>خَرِيطَةُ الوَرْشَةِ</a:t>
@@ -15151,6 +15244,7 @@
                   <a:srgbClr val="1B3B6F"/>
                 </a:solidFill>
                 <a:latin typeface="Amiri" pitchFamily="2" charset="-78"/>
+                <a:ea typeface="Amiri" pitchFamily="2" charset="-78"/>
                 <a:cs typeface="Amiri" pitchFamily="2" charset="-78"/>
               </a:rPr>
               <a:t>كَيْفَ</a:t>
@@ -15427,6 +15521,7 @@
                   <a:srgbClr val="1E6B52"/>
                 </a:solidFill>
                 <a:latin typeface="Amiri" pitchFamily="2" charset="-78"/>
+                <a:ea typeface="Amiri" pitchFamily="2" charset="-78"/>
                 <a:cs typeface="Amiri" pitchFamily="2" charset="-78"/>
               </a:rPr>
               <a:t>الاسْتِمَارَةُ</a:t>
@@ -15703,6 +15798,7 @@
                   <a:srgbClr val="1E6B52"/>
                 </a:solidFill>
                 <a:latin typeface="Amiri" pitchFamily="2" charset="-78"/>
+                <a:ea typeface="Amiri" pitchFamily="2" charset="-78"/>
                 <a:cs typeface="Amiri" pitchFamily="2" charset="-78"/>
               </a:rPr>
               <a:t>الرِّسَالَةُ</a:t>
@@ -15979,6 +16075,7 @@
                   <a:srgbClr val="1E6B52"/>
                 </a:solidFill>
                 <a:latin typeface="Amiri" pitchFamily="2" charset="-78"/>
+                <a:ea typeface="Amiri" pitchFamily="2" charset="-78"/>
                 <a:cs typeface="Amiri" pitchFamily="2" charset="-78"/>
               </a:rPr>
               <a:t>المَقَالُ</a:t>
@@ -16255,6 +16352,7 @@
                   <a:srgbClr val="8A6D1E"/>
                 </a:solidFill>
                 <a:latin typeface="Amiri" pitchFamily="2" charset="-78"/>
+                <a:ea typeface="Amiri" pitchFamily="2" charset="-78"/>
                 <a:cs typeface="Amiri" pitchFamily="2" charset="-78"/>
               </a:rPr>
               <a:t>قَيِّمْ</a:t>
@@ -16498,6 +16596,7 @@
                   <a:srgbClr val="D4AF37"/>
                 </a:solidFill>
                 <a:latin typeface="Amiri" pitchFamily="2" charset="-78"/>
+                <a:ea typeface="Amiri" pitchFamily="2" charset="-78"/>
                 <a:cs typeface="Amiri" pitchFamily="2" charset="-78"/>
               </a:rPr>
               <a:t>م</a:t>
@@ -16818,6 +16917,7 @@
                   <a:srgbClr val="8A6D1E"/>
                 </a:solidFill>
                 <a:latin typeface="Amiri" pitchFamily="2" charset="-78"/>
+                <a:ea typeface="Amiri" pitchFamily="2" charset="-78"/>
                 <a:cs typeface="Amiri" pitchFamily="2" charset="-78"/>
               </a:rPr>
               <a:t>امْتِحَانُ الكِتَابَةِ</a:t>
@@ -17442,6 +17542,7 @@
                   <a:srgbClr val="1B3B6F"/>
                 </a:solidFill>
                 <a:latin typeface="Amiri" pitchFamily="2" charset="-78"/>
+                <a:ea typeface="Amiri" pitchFamily="2" charset="-78"/>
                 <a:cs typeface="Amiri" pitchFamily="2" charset="-78"/>
               </a:rPr>
               <a:t>لَدَيَّ شَهَادَةٌ مُتَقَدِّمَةٌ فِي السِّبَاحَةِ</a:t>
@@ -17541,6 +17642,7 @@
                   <a:srgbClr val="1B3B6F"/>
                 </a:solidFill>
                 <a:latin typeface="Amiri" pitchFamily="2" charset="-78"/>
+                <a:ea typeface="Amiri" pitchFamily="2" charset="-78"/>
                 <a:cs typeface="Amiri" pitchFamily="2" charset="-78"/>
               </a:rPr>
               <a:t>الدَّوْرَةُ الَّتِي حَضَرْتُهَا</a:t>
@@ -17640,6 +17742,7 @@
                   <a:srgbClr val="1B3B6F"/>
                 </a:solidFill>
                 <a:latin typeface="Amiri" pitchFamily="2" charset="-78"/>
+                <a:ea typeface="Amiri" pitchFamily="2" charset="-78"/>
                 <a:cs typeface="Amiri" pitchFamily="2" charset="-78"/>
               </a:rPr>
               <a:t>بَعْدَ أَنْ أُنْهِيَ المَدْرَسَةَ، سَأَدْرُسُ …</a:t>
@@ -17811,6 +17914,7 @@
                   <a:srgbClr val="D4AF37"/>
                 </a:solidFill>
                 <a:latin typeface="Amiri" pitchFamily="2" charset="-78"/>
+                <a:ea typeface="Amiri" pitchFamily="2" charset="-78"/>
                 <a:cs typeface="Amiri" pitchFamily="2" charset="-78"/>
               </a:rPr>
               <a:t>م</a:t>
@@ -18131,6 +18235,7 @@
                   <a:srgbClr val="8A6D1E"/>
                 </a:solidFill>
                 <a:latin typeface="Amiri" pitchFamily="2" charset="-78"/>
+                <a:ea typeface="Amiri" pitchFamily="2" charset="-78"/>
                 <a:cs typeface="Amiri" pitchFamily="2" charset="-78"/>
               </a:rPr>
               <a:t>اسْتِمَارَةُ التَّسْجِيلِ فِي دَوْرَةٍ تَدْرِيبِيَّةٍ</a:t>
@@ -18487,6 +18592,7 @@
                   <a:srgbClr val="1B3B6F"/>
                 </a:solidFill>
                 <a:latin typeface="Amiri" pitchFamily="2" charset="-78"/>
+                <a:ea typeface="Amiri" pitchFamily="2" charset="-78"/>
                 <a:cs typeface="Amiri" pitchFamily="2" charset="-78"/>
               </a:rPr>
               <a:t>الاسْمُ وَالعُمْرُ</a:t>
@@ -18731,6 +18837,7 @@
                   <a:srgbClr val="1B3B6F"/>
                 </a:solidFill>
                 <a:latin typeface="Amiri" pitchFamily="2" charset="-78"/>
+                <a:ea typeface="Amiri" pitchFamily="2" charset="-78"/>
                 <a:cs typeface="Amiri" pitchFamily="2" charset="-78"/>
               </a:rPr>
               <a:t>الدَّوْرَةُ المَطْلُوبَةُ</a:t>
@@ -18975,6 +19082,7 @@
                   <a:srgbClr val="1B3B6F"/>
                 </a:solidFill>
                 <a:latin typeface="Amiri" pitchFamily="2" charset="-78"/>
+                <a:ea typeface="Amiri" pitchFamily="2" charset="-78"/>
                 <a:cs typeface="Amiri" pitchFamily="2" charset="-78"/>
               </a:rPr>
               <a:t>الشَّهَادَاتُ الَّتِي لَدَيْكَ</a:t>
@@ -19219,6 +19327,7 @@
                   <a:srgbClr val="1B3B6F"/>
                 </a:solidFill>
                 <a:latin typeface="Amiri" pitchFamily="2" charset="-78"/>
+                <a:ea typeface="Amiri" pitchFamily="2" charset="-78"/>
                 <a:cs typeface="Amiri" pitchFamily="2" charset="-78"/>
               </a:rPr>
               <a:t>المَدْرَسَةُ</a:t>
@@ -19463,6 +19572,7 @@
                   <a:srgbClr val="1B3B6F"/>
                 </a:solidFill>
                 <a:latin typeface="Amiri" pitchFamily="2" charset="-78"/>
+                <a:ea typeface="Amiri" pitchFamily="2" charset="-78"/>
                 <a:cs typeface="Amiri" pitchFamily="2" charset="-78"/>
               </a:rPr>
               <a:t>مَهَارَتَانِ</a:t>
@@ -19707,6 +19817,7 @@
                   <a:srgbClr val="1B3B6F"/>
                 </a:solidFill>
                 <a:latin typeface="Amiri" pitchFamily="2" charset="-78"/>
+                <a:ea typeface="Amiri" pitchFamily="2" charset="-78"/>
                 <a:cs typeface="Amiri" pitchFamily="2" charset="-78"/>
               </a:rPr>
               <a:t>الأَيَّامُ المُنَاسِبَةُ</a:t>
@@ -19951,6 +20062,7 @@
                   <a:srgbClr val="1B3B6F"/>
                 </a:solidFill>
                 <a:latin typeface="Amiri" pitchFamily="2" charset="-78"/>
+                <a:ea typeface="Amiri" pitchFamily="2" charset="-78"/>
                 <a:cs typeface="Amiri" pitchFamily="2" charset="-78"/>
               </a:rPr>
               <a:t>خِبْرَةُ تَطَوُّعٍ</a:t>
@@ -20130,6 +20242,7 @@
                   <a:srgbClr val="1B3B6F"/>
                 </a:solidFill>
                 <a:latin typeface="Amiri" pitchFamily="2" charset="-78"/>
+                <a:ea typeface="Amiri" pitchFamily="2" charset="-78"/>
                 <a:cs typeface="Amiri" pitchFamily="2" charset="-78"/>
               </a:rPr>
               <a:t>جُمْلَةٌ: لِمَاذَا تُرِيدُ هٰذِهِ الدَّوْرَةَ؟</a:t>
@@ -20339,6 +20452,7 @@
                   <a:srgbClr val="D4AF37"/>
                 </a:solidFill>
                 <a:latin typeface="Amiri" pitchFamily="2" charset="-78"/>
+                <a:ea typeface="Amiri" pitchFamily="2" charset="-78"/>
                 <a:cs typeface="Amiri" pitchFamily="2" charset="-78"/>
               </a:rPr>
               <a:t>م</a:t>
@@ -20659,6 +20773,7 @@
                   <a:srgbClr val="8A6D1E"/>
                 </a:solidFill>
                 <a:latin typeface="Amiri" pitchFamily="2" charset="-78"/>
+                <a:ea typeface="Amiri" pitchFamily="2" charset="-78"/>
                 <a:cs typeface="Amiri" pitchFamily="2" charset="-78"/>
               </a:rPr>
               <a:t>نَمُوذَجُ الإِجَابَةِ</a:t>
@@ -20977,6 +21092,7 @@
                   <a:srgbClr val="1B3B6F"/>
                 </a:solidFill>
                 <a:latin typeface="Amiri" pitchFamily="2" charset="-78"/>
+                <a:ea typeface="Amiri" pitchFamily="2" charset="-78"/>
                 <a:cs typeface="Amiri" pitchFamily="2" charset="-78"/>
               </a:rPr>
               <a:t>حَمْزَةُ يُوسُفُ، خَمْسَ عَشْرَةَ سَنَةً</a:t>
@@ -21015,6 +21131,7 @@
                   <a:srgbClr val="1B3B6F"/>
                 </a:solidFill>
                 <a:latin typeface="Amiri" pitchFamily="2" charset="-78"/>
+                <a:ea typeface="Amiri" pitchFamily="2" charset="-78"/>
                 <a:cs typeface="Amiri" pitchFamily="2" charset="-78"/>
               </a:rPr>
               <a:t>الاسْمُ وَالعُمْرُ</a:t>
@@ -21156,6 +21273,7 @@
                   <a:srgbClr val="1B3B6F"/>
                 </a:solidFill>
                 <a:latin typeface="Amiri" pitchFamily="2" charset="-78"/>
+                <a:ea typeface="Amiri" pitchFamily="2" charset="-78"/>
                 <a:cs typeface="Amiri" pitchFamily="2" charset="-78"/>
               </a:rPr>
               <a:t>الإِسْعَافَاتُ الأَوَّلِيَّةُ</a:t>
@@ -21194,6 +21312,7 @@
                   <a:srgbClr val="1B3B6F"/>
                 </a:solidFill>
                 <a:latin typeface="Amiri" pitchFamily="2" charset="-78"/>
+                <a:ea typeface="Amiri" pitchFamily="2" charset="-78"/>
                 <a:cs typeface="Amiri" pitchFamily="2" charset="-78"/>
               </a:rPr>
               <a:t>الدَّوْرَةُ المَطْلُوبَةُ</a:t>
@@ -21335,6 +21454,7 @@
                   <a:srgbClr val="1B3B6F"/>
                 </a:solidFill>
                 <a:latin typeface="Amiri" pitchFamily="2" charset="-78"/>
+                <a:ea typeface="Amiri" pitchFamily="2" charset="-78"/>
                 <a:cs typeface="Amiri" pitchFamily="2" charset="-78"/>
               </a:rPr>
               <a:t>شَهَادَةٌ فِي السِّبَاحَةِ</a:t>
@@ -21373,6 +21493,7 @@
                   <a:srgbClr val="1B3B6F"/>
                 </a:solidFill>
                 <a:latin typeface="Amiri" pitchFamily="2" charset="-78"/>
+                <a:ea typeface="Amiri" pitchFamily="2" charset="-78"/>
                 <a:cs typeface="Amiri" pitchFamily="2" charset="-78"/>
               </a:rPr>
               <a:t>الشَّهَادَاتُ الَّتِي لَدَيْكَ</a:t>
@@ -21514,6 +21635,7 @@
                   <a:srgbClr val="1B3B6F"/>
                 </a:solidFill>
                 <a:latin typeface="Amiri" pitchFamily="2" charset="-78"/>
+                <a:ea typeface="Amiri" pitchFamily="2" charset="-78"/>
                 <a:cs typeface="Amiri" pitchFamily="2" charset="-78"/>
               </a:rPr>
               <a:t>مَدْرَسَةُ المَدِينَةِ</a:t>
@@ -21552,6 +21674,7 @@
                   <a:srgbClr val="1B3B6F"/>
                 </a:solidFill>
                 <a:latin typeface="Amiri" pitchFamily="2" charset="-78"/>
+                <a:ea typeface="Amiri" pitchFamily="2" charset="-78"/>
                 <a:cs typeface="Amiri" pitchFamily="2" charset="-78"/>
               </a:rPr>
               <a:t>المَدْرَسَةُ</a:t>
@@ -21693,6 +21816,7 @@
                   <a:srgbClr val="1B3B6F"/>
                 </a:solidFill>
                 <a:latin typeface="Amiri" pitchFamily="2" charset="-78"/>
+                <a:ea typeface="Amiri" pitchFamily="2" charset="-78"/>
                 <a:cs typeface="Amiri" pitchFamily="2" charset="-78"/>
               </a:rPr>
               <a:t>العَمَلُ الجَمَاعِيُّ وَالتَّنْظِيمُ</a:t>
@@ -21731,6 +21855,7 @@
                   <a:srgbClr val="1B3B6F"/>
                 </a:solidFill>
                 <a:latin typeface="Amiri" pitchFamily="2" charset="-78"/>
+                <a:ea typeface="Amiri" pitchFamily="2" charset="-78"/>
                 <a:cs typeface="Amiri" pitchFamily="2" charset="-78"/>
               </a:rPr>
               <a:t>مَهَارَتَانِ</a:t>
@@ -21872,6 +21997,7 @@
                   <a:srgbClr val="1B3B6F"/>
                 </a:solidFill>
                 <a:latin typeface="Amiri" pitchFamily="2" charset="-78"/>
+                <a:ea typeface="Amiri" pitchFamily="2" charset="-78"/>
                 <a:cs typeface="Amiri" pitchFamily="2" charset="-78"/>
               </a:rPr>
               <a:t>السَّبْتُ وَالأَحَدُ</a:t>
@@ -21910,6 +22036,7 @@
                   <a:srgbClr val="1B3B6F"/>
                 </a:solidFill>
                 <a:latin typeface="Amiri" pitchFamily="2" charset="-78"/>
+                <a:ea typeface="Amiri" pitchFamily="2" charset="-78"/>
                 <a:cs typeface="Amiri" pitchFamily="2" charset="-78"/>
               </a:rPr>
               <a:t>الأَيَّامُ المُنَاسِبَةُ</a:t>
@@ -22051,6 +22178,7 @@
                   <a:srgbClr val="1B3B6F"/>
                 </a:solidFill>
                 <a:latin typeface="Amiri" pitchFamily="2" charset="-78"/>
+                <a:ea typeface="Amiri" pitchFamily="2" charset="-78"/>
                 <a:cs typeface="Amiri" pitchFamily="2" charset="-78"/>
               </a:rPr>
               <a:t>تَدْرِيبُ الأَطْفَالِ فِي نَادِي الحَيِّ</a:t>
@@ -22089,6 +22217,7 @@
                   <a:srgbClr val="1B3B6F"/>
                 </a:solidFill>
                 <a:latin typeface="Amiri" pitchFamily="2" charset="-78"/>
+                <a:ea typeface="Amiri" pitchFamily="2" charset="-78"/>
                 <a:cs typeface="Amiri" pitchFamily="2" charset="-78"/>
               </a:rPr>
               <a:t>خِبْرَةُ تَطَوُّعٍ</a:t>
@@ -22230,6 +22359,7 @@
                   <a:srgbClr val="1B3B6F"/>
                 </a:solidFill>
                 <a:latin typeface="Amiri" pitchFamily="2" charset="-78"/>
+                <a:ea typeface="Amiri" pitchFamily="2" charset="-78"/>
                 <a:cs typeface="Amiri" pitchFamily="2" charset="-78"/>
               </a:rPr>
               <a:t>أُرِيدُهَا لِأَنَّ الشَّهَادَةَ الَّتِي سَأَحْصُلُ عَلَيْهَا شَرْطٌ لِلْعَمَلِ مُنْقِذًا.</a:t>
@@ -22268,6 +22398,7 @@
                   <a:srgbClr val="1B3B6F"/>
                 </a:solidFill>
                 <a:latin typeface="Amiri" pitchFamily="2" charset="-78"/>
+                <a:ea typeface="Amiri" pitchFamily="2" charset="-78"/>
                 <a:cs typeface="Amiri" pitchFamily="2" charset="-78"/>
               </a:rPr>
               <a:t>جُمْلَةٌ: لِمَاذَا تُرِيدُ هٰذِهِ الدَّوْرَةَ؟</a:t>
@@ -22477,6 +22608,7 @@
                   <a:srgbClr val="D4AF37"/>
                 </a:solidFill>
                 <a:latin typeface="Amiri" pitchFamily="2" charset="-78"/>
+                <a:ea typeface="Amiri" pitchFamily="2" charset="-78"/>
                 <a:cs typeface="Amiri" pitchFamily="2" charset="-78"/>
               </a:rPr>
               <a:t>م</a:t>
@@ -22797,6 +22929,7 @@
                   <a:srgbClr val="8A6D1E"/>
                 </a:solidFill>
                 <a:latin typeface="Amiri" pitchFamily="2" charset="-78"/>
+                <a:ea typeface="Amiri" pitchFamily="2" charset="-78"/>
                 <a:cs typeface="Amiri" pitchFamily="2" charset="-78"/>
               </a:rPr>
               <a:t>طَلَبُ التَّسْجِيلِ فِي دَوْرَةٍ</a:t>
@@ -23272,6 +23405,7 @@
                   <a:srgbClr val="1B3B6F"/>
                 </a:solidFill>
                 <a:latin typeface="Amiri" pitchFamily="2" charset="-78"/>
+                <a:ea typeface="Amiri" pitchFamily="2" charset="-78"/>
                 <a:cs typeface="Amiri" pitchFamily="2" charset="-78"/>
               </a:rPr>
               <a:t>أُرِيدُ أَنْ أُسَجِّلَ فِي دَوْرَةِ …</a:t>
@@ -23348,6 +23482,7 @@
                   <a:srgbClr val="1B3B6F"/>
                 </a:solidFill>
                 <a:latin typeface="Amiri" pitchFamily="2" charset="-78"/>
+                <a:ea typeface="Amiri" pitchFamily="2" charset="-78"/>
                 <a:cs typeface="Amiri" pitchFamily="2" charset="-78"/>
               </a:rPr>
               <a:t>عِنْدِي شَهَادَةٌ فِي … وَأَنَا …</a:t>
@@ -23424,6 +23559,7 @@
                   <a:srgbClr val="1B3B6F"/>
                 </a:solidFill>
                 <a:latin typeface="Amiri" pitchFamily="2" charset="-78"/>
+                <a:ea typeface="Amiri" pitchFamily="2" charset="-78"/>
                 <a:cs typeface="Amiri" pitchFamily="2" charset="-78"/>
               </a:rPr>
               <a:t>حَضَرْتُ دَوْرَةً فِي … وَتَعَلَّمْتُ فِيهَا …</a:t>
@@ -23500,6 +23636,7 @@
                   <a:srgbClr val="1B3B6F"/>
                 </a:solidFill>
                 <a:latin typeface="Amiri" pitchFamily="2" charset="-78"/>
+                <a:ea typeface="Amiri" pitchFamily="2" charset="-78"/>
                 <a:cs typeface="Amiri" pitchFamily="2" charset="-78"/>
               </a:rPr>
               <a:t>بَعْدَ الدَّوْرَةِ سَأَتَطَوَّعُ …</a:t>
@@ -23671,6 +23808,7 @@
                   <a:srgbClr val="D4AF37"/>
                 </a:solidFill>
                 <a:latin typeface="Amiri" pitchFamily="2" charset="-78"/>
+                <a:ea typeface="Amiri" pitchFamily="2" charset="-78"/>
                 <a:cs typeface="Amiri" pitchFamily="2" charset="-78"/>
               </a:rPr>
               <a:t>م</a:t>
@@ -23991,6 +24129,7 @@
                   <a:srgbClr val="8A6D1E"/>
                 </a:solidFill>
                 <a:latin typeface="Amiri" pitchFamily="2" charset="-78"/>
+                <a:ea typeface="Amiri" pitchFamily="2" charset="-78"/>
                 <a:cs typeface="Amiri" pitchFamily="2" charset="-78"/>
               </a:rPr>
               <a:t>نَصُّ السُّؤَالِ</a:t>
@@ -24271,6 +24410,7 @@
                   <a:srgbClr val="1B3B6F"/>
                 </a:solidFill>
                 <a:latin typeface="Amiri" pitchFamily="2" charset="-78"/>
+                <a:ea typeface="Amiri" pitchFamily="2" charset="-78"/>
                 <a:cs typeface="Amiri" pitchFamily="2" charset="-78"/>
               </a:rPr>
               <a:t>تُرِيدُ أَنْ تُسَجِّلَ فِي دَوْرَةٍ تَدْرِيبِيَّةٍ. اكْتُبْ رِسَالَةً إِلَى مَرْكَزِ الشَّبَابِ (٨٠–٩٠ كَلِمَةً).</a:t>
@@ -24412,6 +24552,7 @@
                   <a:srgbClr val="1B3B6F"/>
                 </a:solidFill>
                 <a:latin typeface="Amiri" pitchFamily="2" charset="-78"/>
+                <a:ea typeface="Amiri" pitchFamily="2" charset="-78"/>
                 <a:cs typeface="Amiri" pitchFamily="2" charset="-78"/>
               </a:rPr>
               <a:t>أَيُّ دَوْرَةٍ تُرِيدُ؟ وَمَنْ أَنْتَ؟</a:t>
@@ -24553,6 +24694,7 @@
                   <a:srgbClr val="1B3B6F"/>
                 </a:solidFill>
                 <a:latin typeface="Amiri" pitchFamily="2" charset="-78"/>
+                <a:ea typeface="Amiri" pitchFamily="2" charset="-78"/>
                 <a:cs typeface="Amiri" pitchFamily="2" charset="-78"/>
               </a:rPr>
               <a:t>مَا الشَّهَادَاتُ وَالمَهَارَاتُ الَّتِي لَدَيْكَ؟</a:t>
@@ -24694,6 +24836,7 @@
                   <a:srgbClr val="1B3B6F"/>
                 </a:solidFill>
                 <a:latin typeface="Amiri" pitchFamily="2" charset="-78"/>
+                <a:ea typeface="Amiri" pitchFamily="2" charset="-78"/>
                 <a:cs typeface="Amiri" pitchFamily="2" charset="-78"/>
               </a:rPr>
               <a:t>صِفْ دَوْرَةً أَوْ خِبْرَةً سَابِقَةً.</a:t>
@@ -24835,6 +24978,7 @@
                   <a:srgbClr val="1B3B6F"/>
                 </a:solidFill>
                 <a:latin typeface="Amiri" pitchFamily="2" charset="-78"/>
+                <a:ea typeface="Amiri" pitchFamily="2" charset="-78"/>
                 <a:cs typeface="Amiri" pitchFamily="2" charset="-78"/>
               </a:rPr>
               <a:t>لِمَاذَا تُرِيدُ الدَّوْرَةَ؟ اسْأَلْ سُؤَالًا، وَقُلْ مَاذَا سَتَفْعَلُ بَعْدَهَا.</a:t>
@@ -25044,6 +25188,7 @@
                   <a:srgbClr val="D4AF37"/>
                 </a:solidFill>
                 <a:latin typeface="Amiri" pitchFamily="2" charset="-78"/>
+                <a:ea typeface="Amiri" pitchFamily="2" charset="-78"/>
                 <a:cs typeface="Amiri" pitchFamily="2" charset="-78"/>
               </a:rPr>
               <a:t>م</a:t>
@@ -25364,6 +25509,7 @@
                   <a:srgbClr val="8A6D1E"/>
                 </a:solidFill>
                 <a:latin typeface="Amiri" pitchFamily="2" charset="-78"/>
+                <a:ea typeface="Amiri" pitchFamily="2" charset="-78"/>
                 <a:cs typeface="Amiri" pitchFamily="2" charset="-78"/>
               </a:rPr>
               <a:t>قَوَالِبُ الكِتَابَةِ</a:t>
@@ -25644,6 +25790,7 @@
                   <a:srgbClr val="1B3B6F"/>
                 </a:solidFill>
                 <a:latin typeface="Amiri" pitchFamily="2" charset="-78"/>
+                <a:ea typeface="Amiri" pitchFamily="2" charset="-78"/>
                 <a:cs typeface="Amiri" pitchFamily="2" charset="-78"/>
               </a:rPr>
               <a:t>إِلَى مُدِيرِ مَرْكَزِ الشَّبَابِ،</a:t>
@@ -25850,6 +25997,7 @@
                   <a:srgbClr val="1B3B6F"/>
                 </a:solidFill>
                 <a:latin typeface="Amiri" pitchFamily="2" charset="-78"/>
+                <a:ea typeface="Amiri" pitchFamily="2" charset="-78"/>
                 <a:cs typeface="Amiri" pitchFamily="2" charset="-78"/>
               </a:rPr>
               <a:t>أَنَا اسْمِي ______ ، وَعُمْرِي ______ . أُرِيدُ أَنْ أُسَجِّلَ فِي دَوْرَةِ ______ .</a:t>
@@ -26056,6 +26204,7 @@
                   <a:srgbClr val="1B3B6F"/>
                 </a:solidFill>
                 <a:latin typeface="Amiri" pitchFamily="2" charset="-78"/>
+                <a:ea typeface="Amiri" pitchFamily="2" charset="-78"/>
                 <a:cs typeface="Amiri" pitchFamily="2" charset="-78"/>
               </a:rPr>
               <a:t>عِنْدِي شَهَادَةٌ فِي ______ ، وَأَنَا ______ .</a:t>
@@ -26262,6 +26411,7 @@
                   <a:srgbClr val="1B3B6F"/>
                 </a:solidFill>
                 <a:latin typeface="Amiri" pitchFamily="2" charset="-78"/>
+                <a:ea typeface="Amiri" pitchFamily="2" charset="-78"/>
                 <a:cs typeface="Amiri" pitchFamily="2" charset="-78"/>
               </a:rPr>
               <a:t>فِي السَّنَةِ المَاضِيَةِ حَضَرْتُ دَوْرَةً فِي ______ ، وَتَعَلَّمْتُ فِيهَا ______ .</a:t>
@@ -26468,6 +26618,7 @@
                   <a:srgbClr val="1B3B6F"/>
                 </a:solidFill>
                 <a:latin typeface="Amiri" pitchFamily="2" charset="-78"/>
+                <a:ea typeface="Amiri" pitchFamily="2" charset="-78"/>
                 <a:cs typeface="Amiri" pitchFamily="2" charset="-78"/>
               </a:rPr>
               <a:t>أُرِيدُ هٰذِهِ الدَّوْرَةَ لِأَنَّ ______ . هَلِ ______ ؟ بَعْدَ الدَّوْرَةِ سَأَ______ .</a:t>
@@ -26674,6 +26825,7 @@
                   <a:srgbClr val="1B3B6F"/>
                 </a:solidFill>
                 <a:latin typeface="Amiri" pitchFamily="2" charset="-78"/>
+                <a:ea typeface="Amiri" pitchFamily="2" charset="-78"/>
                 <a:cs typeface="Amiri" pitchFamily="2" charset="-78"/>
               </a:rPr>
               <a:t>مَعَ الشُّكْرِ، ______</a:t>
@@ -26913,13 +27065,9 @@
     <a:fontScheme name="Office">
       <a:majorFont>
         <a:latin typeface="Calibri Light" panose="020F0302020204030204"/>
-        <a:ea typeface=""/>
-        <a:cs typeface=""/>
-        <a:font script="Jpan" typeface="游ゴシック Light"/>
-        <a:font script="Hang" typeface="맑은 고딕"/>
-        <a:font script="Hans" typeface="等线 Light"/>
-        <a:font script="Hant" typeface="新細明體"/>
-        <a:font script="Arab" typeface="Times New Roman"/>
+        <a:ea typeface="Amiri" pitchFamily="2" charset="-78"/>
+        <a:cs typeface="Amiri" pitchFamily="2" charset="-78"/>
+        <a:font script="Arab" typeface="Amiri"/>
         <a:font script="Hebr" typeface="Times New Roman"/>
         <a:font script="Thai" typeface="Angsana New"/>
         <a:font script="Ethi" typeface="Nyala"/>
@@ -26965,13 +27113,9 @@
       </a:majorFont>
       <a:minorFont>
         <a:latin typeface="Calibri" panose="020F0502020204030204"/>
-        <a:ea typeface=""/>
-        <a:cs typeface=""/>
-        <a:font script="Jpan" typeface="游ゴシック"/>
-        <a:font script="Hang" typeface="맑은 고딕"/>
-        <a:font script="Hans" typeface="等线"/>
-        <a:font script="Hant" typeface="新細明體"/>
-        <a:font script="Arab" typeface="Arial"/>
+        <a:ea typeface="Amiri" pitchFamily="2" charset="-78"/>
+        <a:cs typeface="Amiri" pitchFamily="2" charset="-78"/>
+        <a:font script="Arab" typeface="Amiri"/>
         <a:font script="Hebr" typeface="Arial"/>
         <a:font script="Thai" typeface="Cordia New"/>
         <a:font script="Ethi" typeface="Nyala"/>

--- a/Topic_D/Exam_Practice/TD-L05_Writing_Workshop_Training_Qualifications_and_Skills.pptx
+++ b/Topic_D/Exam_Practice/TD-L05_Writing_Workshop_Training_Qualifications_and_Skills.pptx
@@ -3848,7 +3848,7 @@
                 <a:solidFill>
                   <a:srgbClr val="FFFFFF"/>
                 </a:solidFill>
-                <a:latin typeface="Calibri" pitchFamily="34" charset="0"/>
+                <a:latin typeface="Amiri" pitchFamily="2" charset="-78"/>
                 <a:ea typeface="Amiri" pitchFamily="2" charset="-78"/>
                 <a:cs typeface="Amiri" pitchFamily="2" charset="-78"/>
               </a:rPr>
@@ -3914,7 +3914,7 @@
                 <a:solidFill>
                   <a:srgbClr val="FFFFFF"/>
                 </a:solidFill>
-                <a:latin typeface="Calibri" pitchFamily="34" charset="0"/>
+                <a:latin typeface="Amiri" pitchFamily="2" charset="-78"/>
                 <a:ea typeface="Amiri" pitchFamily="2" charset="-78"/>
                 <a:cs typeface="Amiri" pitchFamily="2" charset="-78"/>
               </a:rPr>
@@ -3980,7 +3980,7 @@
                 <a:solidFill>
                   <a:srgbClr val="FFFFFF"/>
                 </a:solidFill>
-                <a:latin typeface="Calibri" pitchFamily="34" charset="0"/>
+                <a:latin typeface="Amiri" pitchFamily="2" charset="-78"/>
                 <a:ea typeface="Amiri" pitchFamily="2" charset="-78"/>
                 <a:cs typeface="Amiri" pitchFamily="2" charset="-78"/>
               </a:rPr>
@@ -4046,7 +4046,7 @@
                 <a:solidFill>
                   <a:srgbClr val="FFFFFF"/>
                 </a:solidFill>
-                <a:latin typeface="Calibri" pitchFamily="34" charset="0"/>
+                <a:latin typeface="Amiri" pitchFamily="2" charset="-78"/>
                 <a:ea typeface="Amiri" pitchFamily="2" charset="-78"/>
                 <a:cs typeface="Amiri" pitchFamily="2" charset="-78"/>
               </a:rPr>
@@ -4844,7 +4844,7 @@
                 <a:solidFill>
                   <a:srgbClr val="FFFFFF"/>
                 </a:solidFill>
-                <a:latin typeface="Calibri" pitchFamily="34" charset="0"/>
+                <a:latin typeface="Amiri" pitchFamily="2" charset="-78"/>
                 <a:ea typeface="Amiri" pitchFamily="2" charset="-78"/>
                 <a:cs typeface="Amiri" pitchFamily="2" charset="-78"/>
               </a:rPr>
@@ -4910,7 +4910,7 @@
                 <a:solidFill>
                   <a:srgbClr val="FFFFFF"/>
                 </a:solidFill>
-                <a:latin typeface="Calibri" pitchFamily="34" charset="0"/>
+                <a:latin typeface="Amiri" pitchFamily="2" charset="-78"/>
                 <a:ea typeface="Amiri" pitchFamily="2" charset="-78"/>
                 <a:cs typeface="Amiri" pitchFamily="2" charset="-78"/>
               </a:rPr>
@@ -4976,7 +4976,7 @@
                 <a:solidFill>
                   <a:srgbClr val="FFFFFF"/>
                 </a:solidFill>
-                <a:latin typeface="Calibri" pitchFamily="34" charset="0"/>
+                <a:latin typeface="Amiri" pitchFamily="2" charset="-78"/>
                 <a:ea typeface="Amiri" pitchFamily="2" charset="-78"/>
                 <a:cs typeface="Amiri" pitchFamily="2" charset="-78"/>
               </a:rPr>
@@ -5042,7 +5042,7 @@
                 <a:solidFill>
                   <a:srgbClr val="FFFFFF"/>
                 </a:solidFill>
-                <a:latin typeface="Calibri" pitchFamily="34" charset="0"/>
+                <a:latin typeface="Amiri" pitchFamily="2" charset="-78"/>
                 <a:ea typeface="Amiri" pitchFamily="2" charset="-78"/>
                 <a:cs typeface="Amiri" pitchFamily="2" charset="-78"/>
               </a:rPr>
@@ -8599,7 +8599,7 @@
                 <a:solidFill>
                   <a:srgbClr val="FFFFFF"/>
                 </a:solidFill>
-                <a:latin typeface="Calibri" pitchFamily="34" charset="0"/>
+                <a:latin typeface="Amiri" pitchFamily="2" charset="-78"/>
                 <a:ea typeface="Amiri" pitchFamily="2" charset="-78"/>
                 <a:cs typeface="Amiri" pitchFamily="2" charset="-78"/>
               </a:rPr>
@@ -8665,7 +8665,7 @@
                 <a:solidFill>
                   <a:srgbClr val="FFFFFF"/>
                 </a:solidFill>
-                <a:latin typeface="Calibri" pitchFamily="34" charset="0"/>
+                <a:latin typeface="Amiri" pitchFamily="2" charset="-78"/>
                 <a:ea typeface="Amiri" pitchFamily="2" charset="-78"/>
                 <a:cs typeface="Amiri" pitchFamily="2" charset="-78"/>
               </a:rPr>
@@ -8731,7 +8731,7 @@
                 <a:solidFill>
                   <a:srgbClr val="FFFFFF"/>
                 </a:solidFill>
-                <a:latin typeface="Calibri" pitchFamily="34" charset="0"/>
+                <a:latin typeface="Amiri" pitchFamily="2" charset="-78"/>
                 <a:ea typeface="Amiri" pitchFamily="2" charset="-78"/>
                 <a:cs typeface="Amiri" pitchFamily="2" charset="-78"/>
               </a:rPr>
@@ -8797,7 +8797,7 @@
                 <a:solidFill>
                   <a:srgbClr val="FFFFFF"/>
                 </a:solidFill>
-                <a:latin typeface="Calibri" pitchFamily="34" charset="0"/>
+                <a:latin typeface="Amiri" pitchFamily="2" charset="-78"/>
                 <a:ea typeface="Amiri" pitchFamily="2" charset="-78"/>
                 <a:cs typeface="Amiri" pitchFamily="2" charset="-78"/>
               </a:rPr>
@@ -9584,7 +9584,7 @@
                 <a:solidFill>
                   <a:srgbClr val="FFFFFF"/>
                 </a:solidFill>
-                <a:latin typeface="Calibri" pitchFamily="34" charset="0"/>
+                <a:latin typeface="Amiri" pitchFamily="2" charset="-78"/>
                 <a:ea typeface="Amiri" pitchFamily="2" charset="-78"/>
                 <a:cs typeface="Amiri" pitchFamily="2" charset="-78"/>
               </a:rPr>
@@ -9650,7 +9650,7 @@
                 <a:solidFill>
                   <a:srgbClr val="FFFFFF"/>
                 </a:solidFill>
-                <a:latin typeface="Calibri" pitchFamily="34" charset="0"/>
+                <a:latin typeface="Amiri" pitchFamily="2" charset="-78"/>
                 <a:ea typeface="Amiri" pitchFamily="2" charset="-78"/>
                 <a:cs typeface="Amiri" pitchFamily="2" charset="-78"/>
               </a:rPr>
@@ -9716,7 +9716,7 @@
                 <a:solidFill>
                   <a:srgbClr val="FFFFFF"/>
                 </a:solidFill>
-                <a:latin typeface="Calibri" pitchFamily="34" charset="0"/>
+                <a:latin typeface="Amiri" pitchFamily="2" charset="-78"/>
                 <a:ea typeface="Amiri" pitchFamily="2" charset="-78"/>
                 <a:cs typeface="Amiri" pitchFamily="2" charset="-78"/>
               </a:rPr>
@@ -9782,7 +9782,7 @@
                 <a:solidFill>
                   <a:srgbClr val="FFFFFF"/>
                 </a:solidFill>
-                <a:latin typeface="Calibri" pitchFamily="34" charset="0"/>
+                <a:latin typeface="Amiri" pitchFamily="2" charset="-78"/>
                 <a:ea typeface="Amiri" pitchFamily="2" charset="-78"/>
                 <a:cs typeface="Amiri" pitchFamily="2" charset="-78"/>
               </a:rPr>
@@ -10569,7 +10569,7 @@
                 <a:solidFill>
                   <a:srgbClr val="FFFFFF"/>
                 </a:solidFill>
-                <a:latin typeface="Calibri" pitchFamily="34" charset="0"/>
+                <a:latin typeface="Amiri" pitchFamily="2" charset="-78"/>
                 <a:ea typeface="Amiri" pitchFamily="2" charset="-78"/>
                 <a:cs typeface="Amiri" pitchFamily="2" charset="-78"/>
               </a:rPr>
@@ -10635,7 +10635,7 @@
                 <a:solidFill>
                   <a:srgbClr val="FFFFFF"/>
                 </a:solidFill>
-                <a:latin typeface="Calibri" pitchFamily="34" charset="0"/>
+                <a:latin typeface="Amiri" pitchFamily="2" charset="-78"/>
                 <a:ea typeface="Amiri" pitchFamily="2" charset="-78"/>
                 <a:cs typeface="Amiri" pitchFamily="2" charset="-78"/>
               </a:rPr>
@@ -10701,7 +10701,7 @@
                 <a:solidFill>
                   <a:srgbClr val="FFFFFF"/>
                 </a:solidFill>
-                <a:latin typeface="Calibri" pitchFamily="34" charset="0"/>
+                <a:latin typeface="Amiri" pitchFamily="2" charset="-78"/>
                 <a:ea typeface="Amiri" pitchFamily="2" charset="-78"/>
                 <a:cs typeface="Amiri" pitchFamily="2" charset="-78"/>
               </a:rPr>
@@ -10767,7 +10767,7 @@
                 <a:solidFill>
                   <a:srgbClr val="FFFFFF"/>
                 </a:solidFill>
-                <a:latin typeface="Calibri" pitchFamily="34" charset="0"/>
+                <a:latin typeface="Amiri" pitchFamily="2" charset="-78"/>
                 <a:ea typeface="Amiri" pitchFamily="2" charset="-78"/>
                 <a:cs typeface="Amiri" pitchFamily="2" charset="-78"/>
               </a:rPr>
